--- a/Business Plan.pptx
+++ b/Business Plan.pptx
@@ -7873,7 +7873,7 @@
                     <a:p>
                       <a:pPr algn="r"/>
                       <a:r>
-                        <a:rPr lang="en-US" sz="4000"/>
+                        <a:rPr lang="en-US" sz="4000" dirty="0"/>
                         <a:t>Price per Package (RM) Basic Plan / Month</a:t>
                       </a:r>
                     </a:p>
@@ -7960,7 +7960,7 @@
                     <a:p>
                       <a:pPr algn="r"/>
                       <a:r>
-                        <a:rPr lang="en-US" sz="4000"/>
+                        <a:rPr lang="en-US" sz="4000" dirty="0"/>
                         <a:t>300.00</a:t>
                       </a:r>
                     </a:p>
@@ -8290,7 +8290,7 @@
           <a:p>
             <a:r>
               <a:rPr lang="en-US" sz="3600" b="1" dirty="0"/>
-              <a:t>TARGET MARKET (QUIZZY)</a:t>
+              <a:t>TARGET MARKET (QUIZZLY)</a:t>
             </a:r>
           </a:p>
           <a:p>
@@ -11348,7 +11348,7 @@
             </a:br>
             <a:r>
               <a:rPr lang="en-US" sz="3200" dirty="0" err="1"/>
-              <a:t>Quizzy</a:t>
+              <a:t>Quizzly</a:t>
             </a:r>
             <a:endParaRPr lang="ka-GE" sz="3200" dirty="0"/>
           </a:p>
@@ -14387,7 +14387,7 @@
           <a:graphicData uri="http://schemas.openxmlformats.org/presentationml/2006/ole">
             <mc:AlternateContent xmlns:mc="http://schemas.openxmlformats.org/markup-compatibility/2006">
               <mc:Choice xmlns:v="urn:schemas-microsoft-com:vml" Requires="v">
-                <p:oleObj spid="_x0000_s8196" name="think-cell Slide" r:id="rId4" imgW="425" imgH="424" progId="TCLayout.ActiveDocument.1">
+                <p:oleObj spid="_x0000_s8197" name="think-cell Slide" r:id="rId4" imgW="425" imgH="424" progId="TCLayout.ActiveDocument.1">
                   <p:embed/>
                 </p:oleObj>
               </mc:Choice>
